--- a/courses/z5007/00-oop-then-algorithms/lecture-2.pptx
+++ b/courses/z5007/00-oop-then-algorithms/lecture-2.pptx
@@ -5,7 +5,7 @@
     <p:sldMasterId id="2147483648" r:id="rId1"/>
   </p:sldMasterIdLst>
   <p:notesMasterIdLst>
-    <p:notesMasterId r:id="rId11"/>
+    <p:notesMasterId r:id="rId15"/>
   </p:notesMasterIdLst>
   <p:sldIdLst>
     <p:sldId id="256" r:id="rId2"/>
@@ -17,6 +17,10 @@
     <p:sldId id="262" r:id="rId8"/>
     <p:sldId id="263" r:id="rId9"/>
     <p:sldId id="264" r:id="rId10"/>
+    <p:sldId id="265" r:id="rId11"/>
+    <p:sldId id="266" r:id="rId12"/>
+    <p:sldId id="267" r:id="rId13"/>
+    <p:sldId id="268" r:id="rId14"/>
   </p:sldIdLst>
   <p:sldSz cx="9144000" cy="5143500" type="screen16x9"/>
   <p:notesSz cx="6858000" cy="9144000"/>
@@ -564,7 +568,7 @@
           <a:p>
             <a:fld id="{18BDFEC3-8487-43E8-A154-7C12CBC1FFF2}" type="slidenum">
               <a:rPr lang="en-US"/>
-              <a:t>2</a:t>
+              <a:t>4</a:t>
             </a:fld>
             <a:endParaRPr lang="en-US"/>
           </a:p>
@@ -3613,6 +3617,505 @@
 </p:sld>
 </file>
 
+<file path=ppt/slides/slide10.xml><?xml version="1.0" encoding="utf-8"?>
+<p:sld xmlns:a="http://schemas.openxmlformats.org/drawingml/2006/main" xmlns:r="http://schemas.openxmlformats.org/officeDocument/2006/relationships" xmlns:p="http://schemas.openxmlformats.org/presentationml/2006/main">
+  <p:cSld>
+    <p:spTree>
+      <p:nvGrpSpPr>
+        <p:cNvPr id="1" name=""/>
+        <p:cNvGrpSpPr/>
+        <p:nvPr/>
+      </p:nvGrpSpPr>
+      <p:grpSpPr>
+        <a:xfrm>
+          <a:off x="0" y="0"/>
+          <a:ext cx="0" cy="0"/>
+          <a:chOff x="0" y="0"/>
+          <a:chExt cx="0" cy="0"/>
+        </a:xfrm>
+      </p:grpSpPr>
+      <p:sp>
+        <p:nvSpPr>
+          <p:cNvPr id="2" name="Title 1"/>
+          <p:cNvSpPr>
+            <a:spLocks noGrp="1"/>
+          </p:cNvSpPr>
+          <p:nvPr>
+            <p:ph type="title"/>
+          </p:nvPr>
+        </p:nvSpPr>
+        <p:spPr/>
+        <p:txBody>
+          <a:bodyPr/>
+          <a:lstStyle/>
+          <a:p>
+            <a:pPr lvl="0" indent="0" marL="0">
+              <a:buNone/>
+            </a:pPr>
+            <a:r>
+              <a:rPr/>
+              <a:t>Exercise (do this before the lab)</a:t>
+            </a:r>
+          </a:p>
+        </p:txBody>
+      </p:sp>
+    </p:spTree>
+  </p:cSld>
+</p:sld>
+</file>
+
+<file path=ppt/slides/slide11.xml><?xml version="1.0" encoding="utf-8"?>
+<p:sld xmlns:a="http://schemas.openxmlformats.org/drawingml/2006/main" xmlns:r="http://schemas.openxmlformats.org/officeDocument/2006/relationships" xmlns:p="http://schemas.openxmlformats.org/presentationml/2006/main">
+  <p:cSld>
+    <p:spTree>
+      <p:nvGrpSpPr>
+        <p:cNvPr id="1" name=""/>
+        <p:cNvGrpSpPr/>
+        <p:nvPr/>
+      </p:nvGrpSpPr>
+      <p:grpSpPr>
+        <a:xfrm>
+          <a:off x="0" y="0"/>
+          <a:ext cx="0" cy="0"/>
+          <a:chOff x="0" y="0"/>
+          <a:chExt cx="0" cy="0"/>
+        </a:xfrm>
+      </p:grpSpPr>
+      <p:sp>
+        <p:nvSpPr>
+          <p:cNvPr id="2" name="Title 1"/>
+          <p:cNvSpPr>
+            <a:spLocks noGrp="1"/>
+          </p:cNvSpPr>
+          <p:nvPr>
+            <p:ph type="title"/>
+          </p:nvPr>
+        </p:nvSpPr>
+        <p:spPr/>
+        <p:txBody>
+          <a:bodyPr/>
+          <a:lstStyle/>
+          <a:p>
+            <a:pPr lvl="0" indent="0" marL="0">
+              <a:buNone/>
+            </a:pPr>
+            <a:r>
+              <a:rPr/>
+              <a:t>Quiz — find the gap</a:t>
+            </a:r>
+          </a:p>
+        </p:txBody>
+      </p:sp>
+      <p:sp>
+        <p:nvSpPr>
+          <p:cNvPr id="3" name="Content Placeholder 2"/>
+          <p:cNvSpPr>
+            <a:spLocks noGrp="1"/>
+          </p:cNvSpPr>
+          <p:nvPr>
+            <p:ph idx="1"/>
+          </p:nvPr>
+        </p:nvSpPr>
+        <p:spPr/>
+        <p:txBody>
+          <a:bodyPr/>
+          <a:lstStyle/>
+          <a:p>
+            <a:pPr lvl="0" indent="0">
+              <a:buNone/>
+            </a:pPr>
+            <a:r>
+              <a:rPr b="1">
+                <a:solidFill>
+                  <a:srgbClr val="007020"/>
+                </a:solidFill>
+                <a:latin typeface="Courier"/>
+              </a:rPr>
+              <a:t>class</a:t>
+            </a:r>
+            <a:r>
+              <a:rPr>
+                <a:latin typeface="Courier"/>
+              </a:rPr>
+              <a:t> Wallet:</a:t>
+            </a:r>
+            <a:br/>
+            <a:r>
+              <a:rPr>
+                <a:latin typeface="Courier"/>
+              </a:rPr>
+              <a:t>    </a:t>
+            </a:r>
+            <a:r>
+              <a:rPr b="1">
+                <a:solidFill>
+                  <a:srgbClr val="007020"/>
+                </a:solidFill>
+                <a:latin typeface="Courier"/>
+              </a:rPr>
+              <a:t>def</a:t>
+            </a:r>
+            <a:r>
+              <a:rPr>
+                <a:latin typeface="Courier"/>
+              </a:rPr>
+              <a:t> </a:t>
+            </a:r>
+            <a:r>
+              <a:rPr>
+                <a:solidFill>
+                  <a:srgbClr val="06287E"/>
+                </a:solidFill>
+                <a:latin typeface="Courier"/>
+              </a:rPr>
+              <a:t>__init__</a:t>
+            </a:r>
+            <a:r>
+              <a:rPr>
+                <a:latin typeface="Courier"/>
+              </a:rPr>
+              <a:t>(</a:t>
+            </a:r>
+            <a:r>
+              <a:rPr>
+                <a:solidFill>
+                  <a:srgbClr val="19177C"/>
+                </a:solidFill>
+                <a:latin typeface="Courier"/>
+              </a:rPr>
+              <a:t>self</a:t>
+            </a:r>
+            <a:r>
+              <a:rPr>
+                <a:latin typeface="Courier"/>
+              </a:rPr>
+              <a:t>, cents</a:t>
+            </a:r>
+            <a:r>
+              <a:rPr>
+                <a:solidFill>
+                  <a:srgbClr val="666666"/>
+                </a:solidFill>
+                <a:latin typeface="Courier"/>
+              </a:rPr>
+              <a:t>=</a:t>
+            </a:r>
+            <a:r>
+              <a:rPr>
+                <a:solidFill>
+                  <a:srgbClr val="40A070"/>
+                </a:solidFill>
+                <a:latin typeface="Courier"/>
+              </a:rPr>
+              <a:t>0</a:t>
+            </a:r>
+            <a:r>
+              <a:rPr>
+                <a:latin typeface="Courier"/>
+              </a:rPr>
+              <a:t>):</a:t>
+            </a:r>
+            <a:br/>
+            <a:r>
+              <a:rPr>
+                <a:latin typeface="Courier"/>
+              </a:rPr>
+              <a:t>        </a:t>
+            </a:r>
+            <a:r>
+              <a:rPr>
+                <a:solidFill>
+                  <a:srgbClr val="19177C"/>
+                </a:solidFill>
+                <a:latin typeface="Courier"/>
+              </a:rPr>
+              <a:t>self</a:t>
+            </a:r>
+            <a:r>
+              <a:rPr>
+                <a:latin typeface="Courier"/>
+              </a:rPr>
+              <a:t>.cents </a:t>
+            </a:r>
+            <a:r>
+              <a:rPr>
+                <a:solidFill>
+                  <a:srgbClr val="666666"/>
+                </a:solidFill>
+                <a:latin typeface="Courier"/>
+              </a:rPr>
+              <a:t>=</a:t>
+            </a:r>
+            <a:r>
+              <a:rPr>
+                <a:latin typeface="Courier"/>
+              </a:rPr>
+              <a:t> cents          </a:t>
+            </a:r>
+            <a:r>
+              <a:rPr i="1">
+                <a:solidFill>
+                  <a:srgbClr val="60A0B0"/>
+                </a:solidFill>
+                <a:latin typeface="Courier"/>
+              </a:rPr>
+              <a:t># no underscore — deliberately, for this quiz</a:t>
+            </a:r>
+            <a:br/>
+            <a:br/>
+            <a:r>
+              <a:rPr>
+                <a:latin typeface="Courier"/>
+              </a:rPr>
+              <a:t>    </a:t>
+            </a:r>
+            <a:r>
+              <a:rPr b="1">
+                <a:solidFill>
+                  <a:srgbClr val="007020"/>
+                </a:solidFill>
+                <a:latin typeface="Courier"/>
+              </a:rPr>
+              <a:t>def</a:t>
+            </a:r>
+            <a:r>
+              <a:rPr>
+                <a:latin typeface="Courier"/>
+              </a:rPr>
+              <a:t> add(</a:t>
+            </a:r>
+            <a:r>
+              <a:rPr>
+                <a:solidFill>
+                  <a:srgbClr val="19177C"/>
+                </a:solidFill>
+                <a:latin typeface="Courier"/>
+              </a:rPr>
+              <a:t>self</a:t>
+            </a:r>
+            <a:r>
+              <a:rPr>
+                <a:latin typeface="Courier"/>
+              </a:rPr>
+              <a:t>, amount):</a:t>
+            </a:r>
+            <a:br/>
+            <a:r>
+              <a:rPr>
+                <a:latin typeface="Courier"/>
+              </a:rPr>
+              <a:t>        </a:t>
+            </a:r>
+            <a:r>
+              <a:rPr>
+                <a:solidFill>
+                  <a:srgbClr val="19177C"/>
+                </a:solidFill>
+                <a:latin typeface="Courier"/>
+              </a:rPr>
+              <a:t>self</a:t>
+            </a:r>
+            <a:r>
+              <a:rPr>
+                <a:latin typeface="Courier"/>
+              </a:rPr>
+              <a:t>.cents </a:t>
+            </a:r>
+            <a:r>
+              <a:rPr>
+                <a:solidFill>
+                  <a:srgbClr val="666666"/>
+                </a:solidFill>
+                <a:latin typeface="Courier"/>
+              </a:rPr>
+              <a:t>+=</a:t>
+            </a:r>
+            <a:r>
+              <a:rPr>
+                <a:latin typeface="Courier"/>
+              </a:rPr>
+              <a:t> amount</a:t>
+            </a:r>
+            <a:br/>
+            <a:br/>
+            <a:r>
+              <a:rPr>
+                <a:latin typeface="Courier"/>
+              </a:rPr>
+              <a:t>w </a:t>
+            </a:r>
+            <a:r>
+              <a:rPr>
+                <a:solidFill>
+                  <a:srgbClr val="666666"/>
+                </a:solidFill>
+                <a:latin typeface="Courier"/>
+              </a:rPr>
+              <a:t>=</a:t>
+            </a:r>
+            <a:r>
+              <a:rPr>
+                <a:latin typeface="Courier"/>
+              </a:rPr>
+              <a:t> Wallet(</a:t>
+            </a:r>
+            <a:r>
+              <a:rPr>
+                <a:solidFill>
+                  <a:srgbClr val="40A070"/>
+                </a:solidFill>
+                <a:latin typeface="Courier"/>
+              </a:rPr>
+              <a:t>500</a:t>
+            </a:r>
+            <a:r>
+              <a:rPr>
+                <a:latin typeface="Courier"/>
+              </a:rPr>
+              <a:t>)</a:t>
+            </a:r>
+            <a:br/>
+            <a:r>
+              <a:rPr>
+                <a:latin typeface="Courier"/>
+              </a:rPr>
+              <a:t>w.cents </a:t>
+            </a:r>
+            <a:r>
+              <a:rPr>
+                <a:solidFill>
+                  <a:srgbClr val="666666"/>
+                </a:solidFill>
+                <a:latin typeface="Courier"/>
+              </a:rPr>
+              <a:t>=</a:t>
+            </a:r>
+            <a:r>
+              <a:rPr>
+                <a:latin typeface="Courier"/>
+              </a:rPr>
+              <a:t> </a:t>
+            </a:r>
+            <a:r>
+              <a:rPr>
+                <a:solidFill>
+                  <a:srgbClr val="666666"/>
+                </a:solidFill>
+                <a:latin typeface="Courier"/>
+              </a:rPr>
+              <a:t>-</a:t>
+            </a:r>
+            <a:r>
+              <a:rPr>
+                <a:solidFill>
+                  <a:srgbClr val="40A070"/>
+                </a:solidFill>
+                <a:latin typeface="Courier"/>
+              </a:rPr>
+              <a:t>9999</a:t>
+            </a:r>
+          </a:p>
+        </p:txBody>
+      </p:sp>
+    </p:spTree>
+  </p:cSld>
+</p:sld>
+</file>
+
+<file path=ppt/slides/slide12.xml><?xml version="1.0" encoding="utf-8"?>
+<p:sld xmlns:a="http://schemas.openxmlformats.org/drawingml/2006/main" xmlns:r="http://schemas.openxmlformats.org/officeDocument/2006/relationships" xmlns:p="http://schemas.openxmlformats.org/presentationml/2006/main">
+  <p:cSld>
+    <p:spTree>
+      <p:nvGrpSpPr>
+        <p:cNvPr id="1" name=""/>
+        <p:cNvGrpSpPr/>
+        <p:nvPr/>
+      </p:nvGrpSpPr>
+      <p:grpSpPr>
+        <a:xfrm>
+          <a:off x="0" y="0"/>
+          <a:ext cx="0" cy="0"/>
+          <a:chOff x="0" y="0"/>
+          <a:chExt cx="0" cy="0"/>
+        </a:xfrm>
+      </p:grpSpPr>
+      <p:sp>
+        <p:nvSpPr>
+          <p:cNvPr id="2" name="Title 1"/>
+          <p:cNvSpPr>
+            <a:spLocks noGrp="1"/>
+          </p:cNvSpPr>
+          <p:nvPr>
+            <p:ph type="title"/>
+          </p:nvPr>
+        </p:nvSpPr>
+        <p:spPr/>
+        <p:txBody>
+          <a:bodyPr/>
+          <a:lstStyle/>
+          <a:p>
+            <a:pPr lvl="0" indent="0" marL="0">
+              <a:buNone/>
+            </a:pPr>
+            <a:r>
+              <a:rPr/>
+              <a:t>Quiz — answer</a:t>
+            </a:r>
+          </a:p>
+        </p:txBody>
+      </p:sp>
+    </p:spTree>
+  </p:cSld>
+</p:sld>
+</file>
+
+<file path=ppt/slides/slide13.xml><?xml version="1.0" encoding="utf-8"?>
+<p:sld xmlns:a="http://schemas.openxmlformats.org/drawingml/2006/main" xmlns:r="http://schemas.openxmlformats.org/officeDocument/2006/relationships" xmlns:p="http://schemas.openxmlformats.org/presentationml/2006/main">
+  <p:cSld>
+    <p:spTree>
+      <p:nvGrpSpPr>
+        <p:cNvPr id="1" name=""/>
+        <p:cNvGrpSpPr/>
+        <p:nvPr/>
+      </p:nvGrpSpPr>
+      <p:grpSpPr>
+        <a:xfrm>
+          <a:off x="0" y="0"/>
+          <a:ext cx="0" cy="0"/>
+          <a:chOff x="0" y="0"/>
+          <a:chExt cx="0" cy="0"/>
+        </a:xfrm>
+      </p:grpSpPr>
+      <p:sp>
+        <p:nvSpPr>
+          <p:cNvPr id="2" name="Title 1"/>
+          <p:cNvSpPr>
+            <a:spLocks noGrp="1"/>
+          </p:cNvSpPr>
+          <p:nvPr>
+            <p:ph type="title"/>
+          </p:nvPr>
+        </p:nvSpPr>
+        <p:spPr/>
+        <p:txBody>
+          <a:bodyPr/>
+          <a:lstStyle/>
+          <a:p>
+            <a:pPr lvl="0" indent="0" marL="0">
+              <a:buNone/>
+            </a:pPr>
+            <a:r>
+              <a:rPr/>
+              <a:t>Summary</a:t>
+            </a:r>
+          </a:p>
+        </p:txBody>
+      </p:sp>
+    </p:spTree>
+  </p:cSld>
+</p:sld>
+</file>
+
 <file path=ppt/slides/slide2.xml><?xml version="1.0" encoding="utf-8"?>
 <p:sld xmlns:a="http://schemas.openxmlformats.org/drawingml/2006/main" xmlns:r="http://schemas.openxmlformats.org/officeDocument/2006/relationships" xmlns:p="http://schemas.openxmlformats.org/presentationml/2006/main">
   <p:cSld>
@@ -3650,171 +4153,7 @@
             </a:pPr>
             <a:r>
               <a:rPr/>
-              <a:t>Last time, and the gap it leaves</a:t>
-            </a:r>
-          </a:p>
-        </p:txBody>
-      </p:sp>
-      <p:sp>
-        <p:nvSpPr>
-          <p:cNvPr id="3" name="Content Placeholder 2"/>
-          <p:cNvSpPr>
-            <a:spLocks noGrp="1"/>
-          </p:cNvSpPr>
-          <p:nvPr>
-            <p:ph idx="1"/>
-          </p:nvPr>
-        </p:nvSpPr>
-        <p:spPr/>
-        <p:txBody>
-          <a:bodyPr/>
-          <a:lstStyle/>
-          <a:p>
-            <a:pPr lvl="0" indent="0">
-              <a:buNone/>
-            </a:pPr>
-            <a:r>
-              <a:rPr>
-                <a:latin typeface="Courier"/>
-              </a:rPr>
-              <a:t>p </a:t>
-            </a:r>
-            <a:r>
-              <a:rPr>
-                <a:solidFill>
-                  <a:srgbClr val="666666"/>
-                </a:solidFill>
-                <a:latin typeface="Courier"/>
-              </a:rPr>
-              <a:t>=</a:t>
-            </a:r>
-            <a:r>
-              <a:rPr>
-                <a:latin typeface="Courier"/>
-              </a:rPr>
-              <a:t> Point(</a:t>
-            </a:r>
-            <a:r>
-              <a:rPr>
-                <a:solidFill>
-                  <a:srgbClr val="40A070"/>
-                </a:solidFill>
-                <a:latin typeface="Courier"/>
-              </a:rPr>
-              <a:t>3</a:t>
-            </a:r>
-            <a:r>
-              <a:rPr>
-                <a:latin typeface="Courier"/>
-              </a:rPr>
-              <a:t>, </a:t>
-            </a:r>
-            <a:r>
-              <a:rPr>
-                <a:solidFill>
-                  <a:srgbClr val="40A070"/>
-                </a:solidFill>
-                <a:latin typeface="Courier"/>
-              </a:rPr>
-              <a:t>4</a:t>
-            </a:r>
-            <a:r>
-              <a:rPr>
-                <a:latin typeface="Courier"/>
-              </a:rPr>
-              <a:t>)</a:t>
-            </a:r>
-            <a:br/>
-            <a:r>
-              <a:rPr>
-                <a:latin typeface="Courier"/>
-              </a:rPr>
-              <a:t>p.x </a:t>
-            </a:r>
-            <a:r>
-              <a:rPr>
-                <a:solidFill>
-                  <a:srgbClr val="666666"/>
-                </a:solidFill>
-                <a:latin typeface="Courier"/>
-              </a:rPr>
-              <a:t>=</a:t>
-            </a:r>
-            <a:r>
-              <a:rPr>
-                <a:latin typeface="Courier"/>
-              </a:rPr>
-              <a:t> </a:t>
-            </a:r>
-            <a:r>
-              <a:rPr>
-                <a:solidFill>
-                  <a:srgbClr val="4070A0"/>
-                </a:solidFill>
-                <a:latin typeface="Courier"/>
-              </a:rPr>
-              <a:t>"banana"</a:t>
-            </a:r>
-            <a:r>
-              <a:rPr>
-                <a:latin typeface="Courier"/>
-              </a:rPr>
-              <a:t>          </a:t>
-            </a:r>
-            <a:r>
-              <a:rPr i="1">
-                <a:solidFill>
-                  <a:srgbClr val="60A0B0"/>
-                </a:solidFill>
-                <a:latin typeface="Courier"/>
-              </a:rPr>
-              <a:t># legal Python. Nothing stops this.</a:t>
-            </a:r>
-            <a:br/>
-            <a:r>
-              <a:rPr>
-                <a:latin typeface="Courier"/>
-              </a:rPr>
-              <a:t>p.distance_to(Point(</a:t>
-            </a:r>
-            <a:r>
-              <a:rPr>
-                <a:solidFill>
-                  <a:srgbClr val="40A070"/>
-                </a:solidFill>
-                <a:latin typeface="Courier"/>
-              </a:rPr>
-              <a:t>0</a:t>
-            </a:r>
-            <a:r>
-              <a:rPr>
-                <a:latin typeface="Courier"/>
-              </a:rPr>
-              <a:t>, </a:t>
-            </a:r>
-            <a:r>
-              <a:rPr>
-                <a:solidFill>
-                  <a:srgbClr val="40A070"/>
-                </a:solidFill>
-                <a:latin typeface="Courier"/>
-              </a:rPr>
-              <a:t>0</a:t>
-            </a:r>
-            <a:r>
-              <a:rPr>
-                <a:latin typeface="Courier"/>
-              </a:rPr>
-              <a:t>))   </a:t>
-            </a:r>
-            <a:r>
-              <a:rPr i="1">
-                <a:solidFill>
-                  <a:srgbClr val="60A0B0"/>
-                </a:solidFill>
-                <a:latin typeface="Courier"/>
-              </a:rPr>
-              <a:t># crashes, far from where the mistake was made</a:t>
+              <a:t>Objectives</a:t>
             </a:r>
           </a:p>
         </p:txBody>
@@ -3861,598 +4200,7 @@
             </a:pPr>
             <a:r>
               <a:rPr/>
-              <a:t>Encapsulation: hide the data, expose the behavior</a:t>
-            </a:r>
-          </a:p>
-        </p:txBody>
-      </p:sp>
-      <p:sp>
-        <p:nvSpPr>
-          <p:cNvPr id="3" name="Content Placeholder 2"/>
-          <p:cNvSpPr>
-            <a:spLocks noGrp="1"/>
-          </p:cNvSpPr>
-          <p:nvPr>
-            <p:ph idx="1"/>
-          </p:nvPr>
-        </p:nvSpPr>
-        <p:spPr/>
-        <p:txBody>
-          <a:bodyPr/>
-          <a:lstStyle/>
-          <a:p>
-            <a:pPr lvl="0" indent="0">
-              <a:buNone/>
-            </a:pPr>
-            <a:r>
-              <a:rPr b="1">
-                <a:solidFill>
-                  <a:srgbClr val="007020"/>
-                </a:solidFill>
-                <a:latin typeface="Courier"/>
-              </a:rPr>
-              <a:t>class</a:t>
-            </a:r>
-            <a:r>
-              <a:rPr>
-                <a:latin typeface="Courier"/>
-              </a:rPr>
-              <a:t> BankAccount:</a:t>
-            </a:r>
-            <a:br/>
-            <a:r>
-              <a:rPr>
-                <a:latin typeface="Courier"/>
-              </a:rPr>
-              <a:t>    </a:t>
-            </a:r>
-            <a:r>
-              <a:rPr b="1">
-                <a:solidFill>
-                  <a:srgbClr val="007020"/>
-                </a:solidFill>
-                <a:latin typeface="Courier"/>
-              </a:rPr>
-              <a:t>def</a:t>
-            </a:r>
-            <a:r>
-              <a:rPr>
-                <a:latin typeface="Courier"/>
-              </a:rPr>
-              <a:t> </a:t>
-            </a:r>
-            <a:r>
-              <a:rPr>
-                <a:solidFill>
-                  <a:srgbClr val="06287E"/>
-                </a:solidFill>
-                <a:latin typeface="Courier"/>
-              </a:rPr>
-              <a:t>__init__</a:t>
-            </a:r>
-            <a:r>
-              <a:rPr>
-                <a:latin typeface="Courier"/>
-              </a:rPr>
-              <a:t>(</a:t>
-            </a:r>
-            <a:r>
-              <a:rPr>
-                <a:solidFill>
-                  <a:srgbClr val="19177C"/>
-                </a:solidFill>
-                <a:latin typeface="Courier"/>
-              </a:rPr>
-              <a:t>self</a:t>
-            </a:r>
-            <a:r>
-              <a:rPr>
-                <a:latin typeface="Courier"/>
-              </a:rPr>
-              <a:t>, balance</a:t>
-            </a:r>
-            <a:r>
-              <a:rPr>
-                <a:solidFill>
-                  <a:srgbClr val="666666"/>
-                </a:solidFill>
-                <a:latin typeface="Courier"/>
-              </a:rPr>
-              <a:t>=</a:t>
-            </a:r>
-            <a:r>
-              <a:rPr>
-                <a:solidFill>
-                  <a:srgbClr val="40A070"/>
-                </a:solidFill>
-                <a:latin typeface="Courier"/>
-              </a:rPr>
-              <a:t>0</a:t>
-            </a:r>
-            <a:r>
-              <a:rPr>
-                <a:latin typeface="Courier"/>
-              </a:rPr>
-              <a:t>):</a:t>
-            </a:r>
-            <a:br/>
-            <a:r>
-              <a:rPr>
-                <a:latin typeface="Courier"/>
-              </a:rPr>
-              <a:t>        </a:t>
-            </a:r>
-            <a:r>
-              <a:rPr>
-                <a:solidFill>
-                  <a:srgbClr val="19177C"/>
-                </a:solidFill>
-                <a:latin typeface="Courier"/>
-              </a:rPr>
-              <a:t>self</a:t>
-            </a:r>
-            <a:r>
-              <a:rPr>
-                <a:latin typeface="Courier"/>
-              </a:rPr>
-              <a:t>._balance </a:t>
-            </a:r>
-            <a:r>
-              <a:rPr>
-                <a:solidFill>
-                  <a:srgbClr val="666666"/>
-                </a:solidFill>
-                <a:latin typeface="Courier"/>
-              </a:rPr>
-              <a:t>=</a:t>
-            </a:r>
-            <a:r>
-              <a:rPr>
-                <a:latin typeface="Courier"/>
-              </a:rPr>
-              <a:t> balance     </a:t>
-            </a:r>
-            <a:r>
-              <a:rPr i="1">
-                <a:solidFill>
-                  <a:srgbClr val="60A0B0"/>
-                </a:solidFill>
-                <a:latin typeface="Courier"/>
-              </a:rPr>
-              <a:t># leading underscore: "do not touch directly"</a:t>
-            </a:r>
-            <a:br/>
-            <a:br/>
-            <a:r>
-              <a:rPr>
-                <a:latin typeface="Courier"/>
-              </a:rPr>
-              <a:t>    </a:t>
-            </a:r>
-            <a:r>
-              <a:rPr b="1">
-                <a:solidFill>
-                  <a:srgbClr val="007020"/>
-                </a:solidFill>
-                <a:latin typeface="Courier"/>
-              </a:rPr>
-              <a:t>def</a:t>
-            </a:r>
-            <a:r>
-              <a:rPr>
-                <a:latin typeface="Courier"/>
-              </a:rPr>
-              <a:t> deposit(</a:t>
-            </a:r>
-            <a:r>
-              <a:rPr>
-                <a:solidFill>
-                  <a:srgbClr val="19177C"/>
-                </a:solidFill>
-                <a:latin typeface="Courier"/>
-              </a:rPr>
-              <a:t>self</a:t>
-            </a:r>
-            <a:r>
-              <a:rPr>
-                <a:latin typeface="Courier"/>
-              </a:rPr>
-              <a:t>, amount):</a:t>
-            </a:r>
-            <a:br/>
-            <a:r>
-              <a:rPr>
-                <a:latin typeface="Courier"/>
-              </a:rPr>
-              <a:t>        </a:t>
-            </a:r>
-            <a:r>
-              <a:rPr b="1">
-                <a:solidFill>
-                  <a:srgbClr val="007020"/>
-                </a:solidFill>
-                <a:latin typeface="Courier"/>
-              </a:rPr>
-              <a:t>if</a:t>
-            </a:r>
-            <a:r>
-              <a:rPr>
-                <a:latin typeface="Courier"/>
-              </a:rPr>
-              <a:t> amount </a:t>
-            </a:r>
-            <a:r>
-              <a:rPr>
-                <a:solidFill>
-                  <a:srgbClr val="666666"/>
-                </a:solidFill>
-                <a:latin typeface="Courier"/>
-              </a:rPr>
-              <a:t>&lt;=</a:t>
-            </a:r>
-            <a:r>
-              <a:rPr>
-                <a:latin typeface="Courier"/>
-              </a:rPr>
-              <a:t> </a:t>
-            </a:r>
-            <a:r>
-              <a:rPr>
-                <a:solidFill>
-                  <a:srgbClr val="40A070"/>
-                </a:solidFill>
-                <a:latin typeface="Courier"/>
-              </a:rPr>
-              <a:t>0</a:t>
-            </a:r>
-            <a:r>
-              <a:rPr>
-                <a:latin typeface="Courier"/>
-              </a:rPr>
-              <a:t>:</a:t>
-            </a:r>
-            <a:br/>
-            <a:r>
-              <a:rPr>
-                <a:latin typeface="Courier"/>
-              </a:rPr>
-              <a:t>            </a:t>
-            </a:r>
-            <a:r>
-              <a:rPr b="1">
-                <a:solidFill>
-                  <a:srgbClr val="007020"/>
-                </a:solidFill>
-                <a:latin typeface="Courier"/>
-              </a:rPr>
-              <a:t>raise</a:t>
-            </a:r>
-            <a:r>
-              <a:rPr>
-                <a:latin typeface="Courier"/>
-              </a:rPr>
-              <a:t> </a:t>
-            </a:r>
-            <a:r>
-              <a:rPr>
-                <a:solidFill>
-                  <a:srgbClr val="BC7A00"/>
-                </a:solidFill>
-                <a:latin typeface="Courier"/>
-              </a:rPr>
-              <a:t>ValueError</a:t>
-            </a:r>
-            <a:r>
-              <a:rPr>
-                <a:latin typeface="Courier"/>
-              </a:rPr>
-              <a:t>(</a:t>
-            </a:r>
-            <a:r>
-              <a:rPr>
-                <a:solidFill>
-                  <a:srgbClr val="4070A0"/>
-                </a:solidFill>
-                <a:latin typeface="Courier"/>
-              </a:rPr>
-              <a:t>"deposit must be positive"</a:t>
-            </a:r>
-            <a:r>
-              <a:rPr>
-                <a:latin typeface="Courier"/>
-              </a:rPr>
-              <a:t>)</a:t>
-            </a:r>
-            <a:br/>
-            <a:r>
-              <a:rPr>
-                <a:latin typeface="Courier"/>
-              </a:rPr>
-              <a:t>        </a:t>
-            </a:r>
-            <a:r>
-              <a:rPr>
-                <a:solidFill>
-                  <a:srgbClr val="19177C"/>
-                </a:solidFill>
-                <a:latin typeface="Courier"/>
-              </a:rPr>
-              <a:t>self</a:t>
-            </a:r>
-            <a:r>
-              <a:rPr>
-                <a:latin typeface="Courier"/>
-              </a:rPr>
-              <a:t>._balance </a:t>
-            </a:r>
-            <a:r>
-              <a:rPr>
-                <a:solidFill>
-                  <a:srgbClr val="666666"/>
-                </a:solidFill>
-                <a:latin typeface="Courier"/>
-              </a:rPr>
-              <a:t>+=</a:t>
-            </a:r>
-            <a:r>
-              <a:rPr>
-                <a:latin typeface="Courier"/>
-              </a:rPr>
-              <a:t> amount</a:t>
-            </a:r>
-            <a:br/>
-            <a:br/>
-            <a:r>
-              <a:rPr>
-                <a:latin typeface="Courier"/>
-              </a:rPr>
-              <a:t>    </a:t>
-            </a:r>
-            <a:r>
-              <a:rPr b="1">
-                <a:solidFill>
-                  <a:srgbClr val="007020"/>
-                </a:solidFill>
-                <a:latin typeface="Courier"/>
-              </a:rPr>
-              <a:t>def</a:t>
-            </a:r>
-            <a:r>
-              <a:rPr>
-                <a:latin typeface="Courier"/>
-              </a:rPr>
-              <a:t> withdraw(</a:t>
-            </a:r>
-            <a:r>
-              <a:rPr>
-                <a:solidFill>
-                  <a:srgbClr val="19177C"/>
-                </a:solidFill>
-                <a:latin typeface="Courier"/>
-              </a:rPr>
-              <a:t>self</a:t>
-            </a:r>
-            <a:r>
-              <a:rPr>
-                <a:latin typeface="Courier"/>
-              </a:rPr>
-              <a:t>, amount):</a:t>
-            </a:r>
-            <a:br/>
-            <a:r>
-              <a:rPr>
-                <a:latin typeface="Courier"/>
-              </a:rPr>
-              <a:t>        </a:t>
-            </a:r>
-            <a:r>
-              <a:rPr b="1">
-                <a:solidFill>
-                  <a:srgbClr val="007020"/>
-                </a:solidFill>
-                <a:latin typeface="Courier"/>
-              </a:rPr>
-              <a:t>if</a:t>
-            </a:r>
-            <a:r>
-              <a:rPr>
-                <a:latin typeface="Courier"/>
-              </a:rPr>
-              <a:t> amount </a:t>
-            </a:r>
-            <a:r>
-              <a:rPr>
-                <a:solidFill>
-                  <a:srgbClr val="666666"/>
-                </a:solidFill>
-                <a:latin typeface="Courier"/>
-              </a:rPr>
-              <a:t>&gt;</a:t>
-            </a:r>
-            <a:r>
-              <a:rPr>
-                <a:latin typeface="Courier"/>
-              </a:rPr>
-              <a:t> </a:t>
-            </a:r>
-            <a:r>
-              <a:rPr>
-                <a:solidFill>
-                  <a:srgbClr val="19177C"/>
-                </a:solidFill>
-                <a:latin typeface="Courier"/>
-              </a:rPr>
-              <a:t>self</a:t>
-            </a:r>
-            <a:r>
-              <a:rPr>
-                <a:latin typeface="Courier"/>
-              </a:rPr>
-              <a:t>._balance:</a:t>
-            </a:r>
-            <a:br/>
-            <a:r>
-              <a:rPr>
-                <a:latin typeface="Courier"/>
-              </a:rPr>
-              <a:t>            </a:t>
-            </a:r>
-            <a:r>
-              <a:rPr b="1">
-                <a:solidFill>
-                  <a:srgbClr val="007020"/>
-                </a:solidFill>
-                <a:latin typeface="Courier"/>
-              </a:rPr>
-              <a:t>raise</a:t>
-            </a:r>
-            <a:r>
-              <a:rPr>
-                <a:latin typeface="Courier"/>
-              </a:rPr>
-              <a:t> </a:t>
-            </a:r>
-            <a:r>
-              <a:rPr>
-                <a:solidFill>
-                  <a:srgbClr val="BC7A00"/>
-                </a:solidFill>
-                <a:latin typeface="Courier"/>
-              </a:rPr>
-              <a:t>ValueError</a:t>
-            </a:r>
-            <a:r>
-              <a:rPr>
-                <a:latin typeface="Courier"/>
-              </a:rPr>
-              <a:t>(</a:t>
-            </a:r>
-            <a:r>
-              <a:rPr>
-                <a:solidFill>
-                  <a:srgbClr val="4070A0"/>
-                </a:solidFill>
-                <a:latin typeface="Courier"/>
-              </a:rPr>
-              <a:t>"insufficient funds"</a:t>
-            </a:r>
-            <a:r>
-              <a:rPr>
-                <a:latin typeface="Courier"/>
-              </a:rPr>
-              <a:t>)</a:t>
-            </a:r>
-            <a:br/>
-            <a:r>
-              <a:rPr>
-                <a:latin typeface="Courier"/>
-              </a:rPr>
-              <a:t>        </a:t>
-            </a:r>
-            <a:r>
-              <a:rPr>
-                <a:solidFill>
-                  <a:srgbClr val="19177C"/>
-                </a:solidFill>
-                <a:latin typeface="Courier"/>
-              </a:rPr>
-              <a:t>self</a:t>
-            </a:r>
-            <a:r>
-              <a:rPr>
-                <a:latin typeface="Courier"/>
-              </a:rPr>
-              <a:t>._balance </a:t>
-            </a:r>
-            <a:r>
-              <a:rPr>
-                <a:solidFill>
-                  <a:srgbClr val="666666"/>
-                </a:solidFill>
-                <a:latin typeface="Courier"/>
-              </a:rPr>
-              <a:t>-=</a:t>
-            </a:r>
-            <a:r>
-              <a:rPr>
-                <a:latin typeface="Courier"/>
-              </a:rPr>
-              <a:t> amount</a:t>
-            </a:r>
-            <a:br/>
-            <a:br/>
-            <a:r>
-              <a:rPr>
-                <a:latin typeface="Courier"/>
-              </a:rPr>
-              <a:t>    </a:t>
-            </a:r>
-            <a:r>
-              <a:rPr b="1">
-                <a:solidFill>
-                  <a:srgbClr val="007020"/>
-                </a:solidFill>
-                <a:latin typeface="Courier"/>
-              </a:rPr>
-              <a:t>def</a:t>
-            </a:r>
-            <a:r>
-              <a:rPr>
-                <a:latin typeface="Courier"/>
-              </a:rPr>
-              <a:t> balance(</a:t>
-            </a:r>
-            <a:r>
-              <a:rPr>
-                <a:solidFill>
-                  <a:srgbClr val="19177C"/>
-                </a:solidFill>
-                <a:latin typeface="Courier"/>
-              </a:rPr>
-              <a:t>self</a:t>
-            </a:r>
-            <a:r>
-              <a:rPr>
-                <a:latin typeface="Courier"/>
-              </a:rPr>
-              <a:t>):</a:t>
-            </a:r>
-            <a:br/>
-            <a:r>
-              <a:rPr>
-                <a:latin typeface="Courier"/>
-              </a:rPr>
-              <a:t>        </a:t>
-            </a:r>
-            <a:r>
-              <a:rPr b="1">
-                <a:solidFill>
-                  <a:srgbClr val="007020"/>
-                </a:solidFill>
-                <a:latin typeface="Courier"/>
-              </a:rPr>
-              <a:t>return</a:t>
-            </a:r>
-            <a:r>
-              <a:rPr>
-                <a:latin typeface="Courier"/>
-              </a:rPr>
-              <a:t> </a:t>
-            </a:r>
-            <a:r>
-              <a:rPr>
-                <a:solidFill>
-                  <a:srgbClr val="19177C"/>
-                </a:solidFill>
-                <a:latin typeface="Courier"/>
-              </a:rPr>
-              <a:t>self</a:t>
-            </a:r>
-            <a:r>
-              <a:rPr>
-                <a:latin typeface="Courier"/>
-              </a:rPr>
-              <a:t>._balance</a:t>
+              <a:t>Outline</a:t>
             </a:r>
           </a:p>
         </p:txBody>
@@ -4499,7 +4247,7 @@
             </a:pPr>
             <a:r>
               <a:rPr/>
-              <a:t>Why the leading underscore</a:t>
+              <a:t>Last time, and the gap it leaves</a:t>
             </a:r>
           </a:p>
         </p:txBody>
@@ -4526,7 +4274,7 @@
               <a:rPr>
                 <a:latin typeface="Courier"/>
               </a:rPr>
-              <a:t>account </a:t>
+              <a:t>p </a:t>
             </a:r>
             <a:r>
               <a:rPr>
@@ -4541,7 +4289,7 @@
               <a:rPr>
                 <a:latin typeface="Courier"/>
               </a:rPr>
-              <a:t> BankAccount(</a:t>
+              <a:t> Point(</a:t>
             </a:r>
             <a:r>
               <a:rPr>
@@ -4550,7 +4298,22 @@
                 </a:solidFill>
                 <a:latin typeface="Courier"/>
               </a:rPr>
-              <a:t>100</a:t>
+              <a:t>3</a:t>
+            </a:r>
+            <a:r>
+              <a:rPr>
+                <a:latin typeface="Courier"/>
+              </a:rPr>
+              <a:t>, </a:t>
+            </a:r>
+            <a:r>
+              <a:rPr>
+                <a:solidFill>
+                  <a:srgbClr val="40A070"/>
+                </a:solidFill>
+                <a:latin typeface="Courier"/>
+              </a:rPr>
+              <a:t>4</a:t>
             </a:r>
             <a:r>
               <a:rPr>
@@ -4563,7 +4326,53 @@
               <a:rPr>
                 <a:latin typeface="Courier"/>
               </a:rPr>
-              <a:t>account.deposit(</a:t>
+              <a:t>p.x </a:t>
+            </a:r>
+            <a:r>
+              <a:rPr>
+                <a:solidFill>
+                  <a:srgbClr val="666666"/>
+                </a:solidFill>
+                <a:latin typeface="Courier"/>
+              </a:rPr>
+              <a:t>=</a:t>
+            </a:r>
+            <a:r>
+              <a:rPr>
+                <a:latin typeface="Courier"/>
+              </a:rPr>
+              <a:t> </a:t>
+            </a:r>
+            <a:r>
+              <a:rPr>
+                <a:solidFill>
+                  <a:srgbClr val="4070A0"/>
+                </a:solidFill>
+                <a:latin typeface="Courier"/>
+              </a:rPr>
+              <a:t>"banana"</a:t>
+            </a:r>
+            <a:r>
+              <a:rPr>
+                <a:latin typeface="Courier"/>
+              </a:rPr>
+              <a:t>          </a:t>
+            </a:r>
+            <a:r>
+              <a:rPr i="1">
+                <a:solidFill>
+                  <a:srgbClr val="60A0B0"/>
+                </a:solidFill>
+                <a:latin typeface="Courier"/>
+              </a:rPr>
+              <a:t># legal Python. Nothing stops this.</a:t>
+            </a:r>
+            <a:br/>
+            <a:r>
+              <a:rPr>
+                <a:latin typeface="Courier"/>
+              </a:rPr>
+              <a:t>p.distance_to(Point(</a:t>
             </a:r>
             <a:r>
               <a:rPr>
@@ -4572,29 +4381,28 @@
                 </a:solidFill>
                 <a:latin typeface="Courier"/>
               </a:rPr>
-              <a:t>50</a:t>
-            </a:r>
-            <a:r>
-              <a:rPr>
-                <a:latin typeface="Courier"/>
-              </a:rPr>
-              <a:t>)</a:t>
-            </a:r>
-            <a:br/>
-            <a:r>
-              <a:rPr>
-                <a:solidFill>
-                  <a:srgbClr val="008000"/>
-                </a:solidFill>
-                <a:latin typeface="Courier"/>
-              </a:rPr>
-              <a:t>print</a:t>
-            </a:r>
-            <a:r>
-              <a:rPr>
-                <a:latin typeface="Courier"/>
-              </a:rPr>
-              <a:t>(account.balance())     </a:t>
+              <a:t>0</a:t>
+            </a:r>
+            <a:r>
+              <a:rPr>
+                <a:latin typeface="Courier"/>
+              </a:rPr>
+              <a:t>, </a:t>
+            </a:r>
+            <a:r>
+              <a:rPr>
+                <a:solidFill>
+                  <a:srgbClr val="40A070"/>
+                </a:solidFill>
+                <a:latin typeface="Courier"/>
+              </a:rPr>
+              <a:t>0</a:t>
+            </a:r>
+            <a:r>
+              <a:rPr>
+                <a:latin typeface="Courier"/>
+              </a:rPr>
+              <a:t>))   </a:t>
             </a:r>
             <a:r>
               <a:rPr i="1">
@@ -4603,7 +4411,7 @@
                 </a:solidFill>
                 <a:latin typeface="Courier"/>
               </a:rPr>
-              <a:t># 150 — the only sanctioned way to read it</a:t>
+              <a:t># crashes, far from where the mistake was made</a:t>
             </a:r>
           </a:p>
         </p:txBody>
@@ -4650,7 +4458,7 @@
             </a:pPr>
             <a:r>
               <a:rPr/>
-              <a:t>Tracing a bad withdrawal</a:t>
+              <a:t>Encapsulation: hide the data, expose the behavior</a:t>
             </a:r>
           </a:p>
         </p:txBody>
@@ -4674,10 +4482,71 @@
               <a:buNone/>
             </a:pPr>
             <a:r>
-              <a:rPr>
-                <a:latin typeface="Courier"/>
-              </a:rPr>
-              <a:t>account </a:t>
+              <a:rPr b="1">
+                <a:solidFill>
+                  <a:srgbClr val="007020"/>
+                </a:solidFill>
+                <a:latin typeface="Courier"/>
+              </a:rPr>
+              <a:t>class</a:t>
+            </a:r>
+            <a:r>
+              <a:rPr>
+                <a:latin typeface="Courier"/>
+              </a:rPr>
+              <a:t> BankAccount:</a:t>
+            </a:r>
+            <a:br/>
+            <a:r>
+              <a:rPr>
+                <a:latin typeface="Courier"/>
+              </a:rPr>
+              <a:t>    </a:t>
+            </a:r>
+            <a:r>
+              <a:rPr b="1">
+                <a:solidFill>
+                  <a:srgbClr val="007020"/>
+                </a:solidFill>
+                <a:latin typeface="Courier"/>
+              </a:rPr>
+              <a:t>def</a:t>
+            </a:r>
+            <a:r>
+              <a:rPr>
+                <a:latin typeface="Courier"/>
+              </a:rPr>
+              <a:t> </a:t>
+            </a:r>
+            <a:r>
+              <a:rPr>
+                <a:solidFill>
+                  <a:srgbClr val="06287E"/>
+                </a:solidFill>
+                <a:latin typeface="Courier"/>
+              </a:rPr>
+              <a:t>__init__</a:t>
+            </a:r>
+            <a:r>
+              <a:rPr>
+                <a:latin typeface="Courier"/>
+              </a:rPr>
+              <a:t>(</a:t>
+            </a:r>
+            <a:r>
+              <a:rPr>
+                <a:solidFill>
+                  <a:srgbClr val="19177C"/>
+                </a:solidFill>
+                <a:latin typeface="Courier"/>
+              </a:rPr>
+              <a:t>self</a:t>
+            </a:r>
+            <a:r>
+              <a:rPr>
+                <a:latin typeface="Courier"/>
+              </a:rPr>
+              <a:t>, balance</a:t>
             </a:r>
             <a:r>
               <a:rPr>
@@ -4690,18 +4559,200 @@
             </a:r>
             <a:r>
               <a:rPr>
-                <a:latin typeface="Courier"/>
-              </a:rPr>
-              <a:t> BankAccount(</a:t>
-            </a:r>
-            <a:r>
-              <a:rPr>
                 <a:solidFill>
                   <a:srgbClr val="40A070"/>
                 </a:solidFill>
                 <a:latin typeface="Courier"/>
               </a:rPr>
-              <a:t>100</a:t>
+              <a:t>0</a:t>
+            </a:r>
+            <a:r>
+              <a:rPr>
+                <a:latin typeface="Courier"/>
+              </a:rPr>
+              <a:t>):</a:t>
+            </a:r>
+            <a:br/>
+            <a:r>
+              <a:rPr>
+                <a:latin typeface="Courier"/>
+              </a:rPr>
+              <a:t>        </a:t>
+            </a:r>
+            <a:r>
+              <a:rPr>
+                <a:solidFill>
+                  <a:srgbClr val="19177C"/>
+                </a:solidFill>
+                <a:latin typeface="Courier"/>
+              </a:rPr>
+              <a:t>self</a:t>
+            </a:r>
+            <a:r>
+              <a:rPr>
+                <a:latin typeface="Courier"/>
+              </a:rPr>
+              <a:t>._balance </a:t>
+            </a:r>
+            <a:r>
+              <a:rPr>
+                <a:solidFill>
+                  <a:srgbClr val="666666"/>
+                </a:solidFill>
+                <a:latin typeface="Courier"/>
+              </a:rPr>
+              <a:t>=</a:t>
+            </a:r>
+            <a:r>
+              <a:rPr>
+                <a:latin typeface="Courier"/>
+              </a:rPr>
+              <a:t> balance     </a:t>
+            </a:r>
+            <a:r>
+              <a:rPr i="1">
+                <a:solidFill>
+                  <a:srgbClr val="60A0B0"/>
+                </a:solidFill>
+                <a:latin typeface="Courier"/>
+              </a:rPr>
+              <a:t># leading underscore: "do not touch directly"</a:t>
+            </a:r>
+            <a:br/>
+            <a:br/>
+            <a:r>
+              <a:rPr>
+                <a:latin typeface="Courier"/>
+              </a:rPr>
+              <a:t>    </a:t>
+            </a:r>
+            <a:r>
+              <a:rPr b="1">
+                <a:solidFill>
+                  <a:srgbClr val="007020"/>
+                </a:solidFill>
+                <a:latin typeface="Courier"/>
+              </a:rPr>
+              <a:t>def</a:t>
+            </a:r>
+            <a:r>
+              <a:rPr>
+                <a:latin typeface="Courier"/>
+              </a:rPr>
+              <a:t> deposit(</a:t>
+            </a:r>
+            <a:r>
+              <a:rPr>
+                <a:solidFill>
+                  <a:srgbClr val="19177C"/>
+                </a:solidFill>
+                <a:latin typeface="Courier"/>
+              </a:rPr>
+              <a:t>self</a:t>
+            </a:r>
+            <a:r>
+              <a:rPr>
+                <a:latin typeface="Courier"/>
+              </a:rPr>
+              <a:t>, amount):</a:t>
+            </a:r>
+            <a:br/>
+            <a:r>
+              <a:rPr>
+                <a:latin typeface="Courier"/>
+              </a:rPr>
+              <a:t>        </a:t>
+            </a:r>
+            <a:r>
+              <a:rPr b="1">
+                <a:solidFill>
+                  <a:srgbClr val="007020"/>
+                </a:solidFill>
+                <a:latin typeface="Courier"/>
+              </a:rPr>
+              <a:t>if</a:t>
+            </a:r>
+            <a:r>
+              <a:rPr>
+                <a:latin typeface="Courier"/>
+              </a:rPr>
+              <a:t> amount </a:t>
+            </a:r>
+            <a:r>
+              <a:rPr>
+                <a:solidFill>
+                  <a:srgbClr val="666666"/>
+                </a:solidFill>
+                <a:latin typeface="Courier"/>
+              </a:rPr>
+              <a:t>&lt;=</a:t>
+            </a:r>
+            <a:r>
+              <a:rPr>
+                <a:latin typeface="Courier"/>
+              </a:rPr>
+              <a:t> </a:t>
+            </a:r>
+            <a:r>
+              <a:rPr>
+                <a:solidFill>
+                  <a:srgbClr val="40A070"/>
+                </a:solidFill>
+                <a:latin typeface="Courier"/>
+              </a:rPr>
+              <a:t>0</a:t>
+            </a:r>
+            <a:r>
+              <a:rPr>
+                <a:latin typeface="Courier"/>
+              </a:rPr>
+              <a:t>:</a:t>
+            </a:r>
+            <a:br/>
+            <a:r>
+              <a:rPr>
+                <a:latin typeface="Courier"/>
+              </a:rPr>
+              <a:t>            </a:t>
+            </a:r>
+            <a:r>
+              <a:rPr b="1">
+                <a:solidFill>
+                  <a:srgbClr val="007020"/>
+                </a:solidFill>
+                <a:latin typeface="Courier"/>
+              </a:rPr>
+              <a:t>raise</a:t>
+            </a:r>
+            <a:r>
+              <a:rPr>
+                <a:latin typeface="Courier"/>
+              </a:rPr>
+              <a:t> </a:t>
+            </a:r>
+            <a:r>
+              <a:rPr>
+                <a:solidFill>
+                  <a:srgbClr val="BC7A00"/>
+                </a:solidFill>
+                <a:latin typeface="Courier"/>
+              </a:rPr>
+              <a:t>ValueError</a:t>
+            </a:r>
+            <a:r>
+              <a:rPr>
+                <a:latin typeface="Courier"/>
+              </a:rPr>
+              <a:t>(</a:t>
+            </a:r>
+            <a:r>
+              <a:rPr>
+                <a:solidFill>
+                  <a:srgbClr val="4070A0"/>
+                </a:solidFill>
+                <a:latin typeface="Courier"/>
+              </a:rPr>
+              <a:t>"deposit must be positive"</a:t>
             </a:r>
             <a:r>
               <a:rPr>
@@ -4714,22 +4765,291 @@
               <a:rPr>
                 <a:latin typeface="Courier"/>
               </a:rPr>
-              <a:t>account.withdraw(</a:t>
-            </a:r>
-            <a:r>
-              <a:rPr>
-                <a:solidFill>
-                  <a:srgbClr val="40A070"/>
-                </a:solidFill>
-                <a:latin typeface="Courier"/>
-              </a:rPr>
-              <a:t>1000</a:t>
+              <a:t>        </a:t>
+            </a:r>
+            <a:r>
+              <a:rPr>
+                <a:solidFill>
+                  <a:srgbClr val="19177C"/>
+                </a:solidFill>
+                <a:latin typeface="Courier"/>
+              </a:rPr>
+              <a:t>self</a:t>
+            </a:r>
+            <a:r>
+              <a:rPr>
+                <a:latin typeface="Courier"/>
+              </a:rPr>
+              <a:t>._balance </a:t>
+            </a:r>
+            <a:r>
+              <a:rPr>
+                <a:solidFill>
+                  <a:srgbClr val="666666"/>
+                </a:solidFill>
+                <a:latin typeface="Courier"/>
+              </a:rPr>
+              <a:t>+=</a:t>
+            </a:r>
+            <a:r>
+              <a:rPr>
+                <a:latin typeface="Courier"/>
+              </a:rPr>
+              <a:t> amount</a:t>
+            </a:r>
+            <a:br/>
+            <a:br/>
+            <a:r>
+              <a:rPr>
+                <a:latin typeface="Courier"/>
+              </a:rPr>
+              <a:t>    </a:t>
+            </a:r>
+            <a:r>
+              <a:rPr b="1">
+                <a:solidFill>
+                  <a:srgbClr val="007020"/>
+                </a:solidFill>
+                <a:latin typeface="Courier"/>
+              </a:rPr>
+              <a:t>def</a:t>
+            </a:r>
+            <a:r>
+              <a:rPr>
+                <a:latin typeface="Courier"/>
+              </a:rPr>
+              <a:t> withdraw(</a:t>
+            </a:r>
+            <a:r>
+              <a:rPr>
+                <a:solidFill>
+                  <a:srgbClr val="19177C"/>
+                </a:solidFill>
+                <a:latin typeface="Courier"/>
+              </a:rPr>
+              <a:t>self</a:t>
+            </a:r>
+            <a:r>
+              <a:rPr>
+                <a:latin typeface="Courier"/>
+              </a:rPr>
+              <a:t>, amount):</a:t>
+            </a:r>
+            <a:br/>
+            <a:r>
+              <a:rPr>
+                <a:latin typeface="Courier"/>
+              </a:rPr>
+              <a:t>        </a:t>
+            </a:r>
+            <a:r>
+              <a:rPr b="1">
+                <a:solidFill>
+                  <a:srgbClr val="007020"/>
+                </a:solidFill>
+                <a:latin typeface="Courier"/>
+              </a:rPr>
+              <a:t>if</a:t>
+            </a:r>
+            <a:r>
+              <a:rPr>
+                <a:latin typeface="Courier"/>
+              </a:rPr>
+              <a:t> amount </a:t>
+            </a:r>
+            <a:r>
+              <a:rPr>
+                <a:solidFill>
+                  <a:srgbClr val="666666"/>
+                </a:solidFill>
+                <a:latin typeface="Courier"/>
+              </a:rPr>
+              <a:t>&gt;</a:t>
+            </a:r>
+            <a:r>
+              <a:rPr>
+                <a:latin typeface="Courier"/>
+              </a:rPr>
+              <a:t> </a:t>
+            </a:r>
+            <a:r>
+              <a:rPr>
+                <a:solidFill>
+                  <a:srgbClr val="19177C"/>
+                </a:solidFill>
+                <a:latin typeface="Courier"/>
+              </a:rPr>
+              <a:t>self</a:t>
+            </a:r>
+            <a:r>
+              <a:rPr>
+                <a:latin typeface="Courier"/>
+              </a:rPr>
+              <a:t>._balance:</a:t>
+            </a:r>
+            <a:br/>
+            <a:r>
+              <a:rPr>
+                <a:latin typeface="Courier"/>
+              </a:rPr>
+              <a:t>            </a:t>
+            </a:r>
+            <a:r>
+              <a:rPr b="1">
+                <a:solidFill>
+                  <a:srgbClr val="007020"/>
+                </a:solidFill>
+                <a:latin typeface="Courier"/>
+              </a:rPr>
+              <a:t>raise</a:t>
+            </a:r>
+            <a:r>
+              <a:rPr>
+                <a:latin typeface="Courier"/>
+              </a:rPr>
+              <a:t> </a:t>
+            </a:r>
+            <a:r>
+              <a:rPr>
+                <a:solidFill>
+                  <a:srgbClr val="BC7A00"/>
+                </a:solidFill>
+                <a:latin typeface="Courier"/>
+              </a:rPr>
+              <a:t>ValueError</a:t>
+            </a:r>
+            <a:r>
+              <a:rPr>
+                <a:latin typeface="Courier"/>
+              </a:rPr>
+              <a:t>(</a:t>
+            </a:r>
+            <a:r>
+              <a:rPr>
+                <a:solidFill>
+                  <a:srgbClr val="4070A0"/>
+                </a:solidFill>
+                <a:latin typeface="Courier"/>
+              </a:rPr>
+              <a:t>"insufficient funds"</a:t>
             </a:r>
             <a:r>
               <a:rPr>
                 <a:latin typeface="Courier"/>
               </a:rPr>
               <a:t>)</a:t>
+            </a:r>
+            <a:br/>
+            <a:r>
+              <a:rPr>
+                <a:latin typeface="Courier"/>
+              </a:rPr>
+              <a:t>        </a:t>
+            </a:r>
+            <a:r>
+              <a:rPr>
+                <a:solidFill>
+                  <a:srgbClr val="19177C"/>
+                </a:solidFill>
+                <a:latin typeface="Courier"/>
+              </a:rPr>
+              <a:t>self</a:t>
+            </a:r>
+            <a:r>
+              <a:rPr>
+                <a:latin typeface="Courier"/>
+              </a:rPr>
+              <a:t>._balance </a:t>
+            </a:r>
+            <a:r>
+              <a:rPr>
+                <a:solidFill>
+                  <a:srgbClr val="666666"/>
+                </a:solidFill>
+                <a:latin typeface="Courier"/>
+              </a:rPr>
+              <a:t>-=</a:t>
+            </a:r>
+            <a:r>
+              <a:rPr>
+                <a:latin typeface="Courier"/>
+              </a:rPr>
+              <a:t> amount</a:t>
+            </a:r>
+            <a:br/>
+            <a:br/>
+            <a:r>
+              <a:rPr>
+                <a:latin typeface="Courier"/>
+              </a:rPr>
+              <a:t>    </a:t>
+            </a:r>
+            <a:r>
+              <a:rPr b="1">
+                <a:solidFill>
+                  <a:srgbClr val="007020"/>
+                </a:solidFill>
+                <a:latin typeface="Courier"/>
+              </a:rPr>
+              <a:t>def</a:t>
+            </a:r>
+            <a:r>
+              <a:rPr>
+                <a:latin typeface="Courier"/>
+              </a:rPr>
+              <a:t> balance(</a:t>
+            </a:r>
+            <a:r>
+              <a:rPr>
+                <a:solidFill>
+                  <a:srgbClr val="19177C"/>
+                </a:solidFill>
+                <a:latin typeface="Courier"/>
+              </a:rPr>
+              <a:t>self</a:t>
+            </a:r>
+            <a:r>
+              <a:rPr>
+                <a:latin typeface="Courier"/>
+              </a:rPr>
+              <a:t>):</a:t>
+            </a:r>
+            <a:br/>
+            <a:r>
+              <a:rPr>
+                <a:latin typeface="Courier"/>
+              </a:rPr>
+              <a:t>        </a:t>
+            </a:r>
+            <a:r>
+              <a:rPr b="1">
+                <a:solidFill>
+                  <a:srgbClr val="007020"/>
+                </a:solidFill>
+                <a:latin typeface="Courier"/>
+              </a:rPr>
+              <a:t>return</a:t>
+            </a:r>
+            <a:r>
+              <a:rPr>
+                <a:latin typeface="Courier"/>
+              </a:rPr>
+              <a:t> </a:t>
+            </a:r>
+            <a:r>
+              <a:rPr>
+                <a:solidFill>
+                  <a:srgbClr val="19177C"/>
+                </a:solidFill>
+                <a:latin typeface="Courier"/>
+              </a:rPr>
+              <a:t>self</a:t>
+            </a:r>
+            <a:r>
+              <a:rPr>
+                <a:latin typeface="Courier"/>
+              </a:rPr>
+              <a:t>._balance</a:t>
             </a:r>
           </a:p>
         </p:txBody>
@@ -4776,7 +5096,7 @@
             </a:pPr>
             <a:r>
               <a:rPr/>
-              <a:t>A second worked example: enforcing a valid range</a:t>
+              <a:t>Why the leading underscore</a:t>
             </a:r>
           </a:p>
         </p:txBody>
@@ -4800,26 +5120,78 @@
               <a:buNone/>
             </a:pPr>
             <a:r>
-              <a:rPr b="1">
-                <a:solidFill>
-                  <a:srgbClr val="007020"/>
-                </a:solidFill>
-                <a:latin typeface="Courier"/>
-              </a:rPr>
-              <a:t>class</a:t>
-            </a:r>
-            <a:r>
-              <a:rPr>
-                <a:latin typeface="Courier"/>
-              </a:rPr>
-              <a:t> Temperature:</a:t>
+              <a:rPr>
+                <a:latin typeface="Courier"/>
+              </a:rPr>
+              <a:t>account </a:t>
+            </a:r>
+            <a:r>
+              <a:rPr>
+                <a:solidFill>
+                  <a:srgbClr val="666666"/>
+                </a:solidFill>
+                <a:latin typeface="Courier"/>
+              </a:rPr>
+              <a:t>=</a:t>
+            </a:r>
+            <a:r>
+              <a:rPr>
+                <a:latin typeface="Courier"/>
+              </a:rPr>
+              <a:t> BankAccount(</a:t>
+            </a:r>
+            <a:r>
+              <a:rPr>
+                <a:solidFill>
+                  <a:srgbClr val="40A070"/>
+                </a:solidFill>
+                <a:latin typeface="Courier"/>
+              </a:rPr>
+              <a:t>100</a:t>
+            </a:r>
+            <a:r>
+              <a:rPr>
+                <a:latin typeface="Courier"/>
+              </a:rPr>
+              <a:t>)</a:t>
             </a:r>
             <a:br/>
             <a:r>
               <a:rPr>
                 <a:latin typeface="Courier"/>
               </a:rPr>
-              <a:t>    </a:t>
+              <a:t>account.deposit(</a:t>
+            </a:r>
+            <a:r>
+              <a:rPr>
+                <a:solidFill>
+                  <a:srgbClr val="40A070"/>
+                </a:solidFill>
+                <a:latin typeface="Courier"/>
+              </a:rPr>
+              <a:t>50</a:t>
+            </a:r>
+            <a:r>
+              <a:rPr>
+                <a:latin typeface="Courier"/>
+              </a:rPr>
+              <a:t>)</a:t>
+            </a:r>
+            <a:br/>
+            <a:r>
+              <a:rPr>
+                <a:solidFill>
+                  <a:srgbClr val="008000"/>
+                </a:solidFill>
+                <a:latin typeface="Courier"/>
+              </a:rPr>
+              <a:t>print</a:t>
+            </a:r>
+            <a:r>
+              <a:rPr>
+                <a:latin typeface="Courier"/>
+              </a:rPr>
+              <a:t>(account.balance())     </a:t>
             </a:r>
             <a:r>
               <a:rPr i="1">
@@ -4828,509 +5200,7 @@
                 </a:solidFill>
                 <a:latin typeface="Courier"/>
               </a:rPr>
-              <a:t>"""Stores a temperature in Celsius, refusing physically impossible values."""</a:t>
-            </a:r>
-            <a:br/>
-            <a:br/>
-            <a:r>
-              <a:rPr>
-                <a:latin typeface="Courier"/>
-              </a:rPr>
-              <a:t>    ABSOLUTE_ZERO_C </a:t>
-            </a:r>
-            <a:r>
-              <a:rPr>
-                <a:solidFill>
-                  <a:srgbClr val="666666"/>
-                </a:solidFill>
-                <a:latin typeface="Courier"/>
-              </a:rPr>
-              <a:t>=</a:t>
-            </a:r>
-            <a:r>
-              <a:rPr>
-                <a:latin typeface="Courier"/>
-              </a:rPr>
-              <a:t> </a:t>
-            </a:r>
-            <a:r>
-              <a:rPr>
-                <a:solidFill>
-                  <a:srgbClr val="666666"/>
-                </a:solidFill>
-                <a:latin typeface="Courier"/>
-              </a:rPr>
-              <a:t>-</a:t>
-            </a:r>
-            <a:r>
-              <a:rPr>
-                <a:solidFill>
-                  <a:srgbClr val="40A070"/>
-                </a:solidFill>
-                <a:latin typeface="Courier"/>
-              </a:rPr>
-              <a:t>273.15</a:t>
-            </a:r>
-            <a:br/>
-            <a:br/>
-            <a:r>
-              <a:rPr>
-                <a:latin typeface="Courier"/>
-              </a:rPr>
-              <a:t>    </a:t>
-            </a:r>
-            <a:r>
-              <a:rPr b="1">
-                <a:solidFill>
-                  <a:srgbClr val="007020"/>
-                </a:solidFill>
-                <a:latin typeface="Courier"/>
-              </a:rPr>
-              <a:t>def</a:t>
-            </a:r>
-            <a:r>
-              <a:rPr>
-                <a:latin typeface="Courier"/>
-              </a:rPr>
-              <a:t> </a:t>
-            </a:r>
-            <a:r>
-              <a:rPr>
-                <a:solidFill>
-                  <a:srgbClr val="06287E"/>
-                </a:solidFill>
-                <a:latin typeface="Courier"/>
-              </a:rPr>
-              <a:t>__init__</a:t>
-            </a:r>
-            <a:r>
-              <a:rPr>
-                <a:latin typeface="Courier"/>
-              </a:rPr>
-              <a:t>(</a:t>
-            </a:r>
-            <a:r>
-              <a:rPr>
-                <a:solidFill>
-                  <a:srgbClr val="19177C"/>
-                </a:solidFill>
-                <a:latin typeface="Courier"/>
-              </a:rPr>
-              <a:t>self</a:t>
-            </a:r>
-            <a:r>
-              <a:rPr>
-                <a:latin typeface="Courier"/>
-              </a:rPr>
-              <a:t>, celsius):</a:t>
-            </a:r>
-            <a:br/>
-            <a:r>
-              <a:rPr>
-                <a:latin typeface="Courier"/>
-              </a:rPr>
-              <a:t>        </a:t>
-            </a:r>
-            <a:r>
-              <a:rPr b="1">
-                <a:solidFill>
-                  <a:srgbClr val="007020"/>
-                </a:solidFill>
-                <a:latin typeface="Courier"/>
-              </a:rPr>
-              <a:t>if</a:t>
-            </a:r>
-            <a:r>
-              <a:rPr>
-                <a:latin typeface="Courier"/>
-              </a:rPr>
-              <a:t> celsius </a:t>
-            </a:r>
-            <a:r>
-              <a:rPr>
-                <a:solidFill>
-                  <a:srgbClr val="666666"/>
-                </a:solidFill>
-                <a:latin typeface="Courier"/>
-              </a:rPr>
-              <a:t>&lt;</a:t>
-            </a:r>
-            <a:r>
-              <a:rPr>
-                <a:latin typeface="Courier"/>
-              </a:rPr>
-              <a:t> </a:t>
-            </a:r>
-            <a:r>
-              <a:rPr>
-                <a:solidFill>
-                  <a:srgbClr val="19177C"/>
-                </a:solidFill>
-                <a:latin typeface="Courier"/>
-              </a:rPr>
-              <a:t>self</a:t>
-            </a:r>
-            <a:r>
-              <a:rPr>
-                <a:latin typeface="Courier"/>
-              </a:rPr>
-              <a:t>.ABSOLUTE_ZERO_C:</a:t>
-            </a:r>
-            <a:br/>
-            <a:r>
-              <a:rPr>
-                <a:latin typeface="Courier"/>
-              </a:rPr>
-              <a:t>            </a:t>
-            </a:r>
-            <a:r>
-              <a:rPr b="1">
-                <a:solidFill>
-                  <a:srgbClr val="007020"/>
-                </a:solidFill>
-                <a:latin typeface="Courier"/>
-              </a:rPr>
-              <a:t>raise</a:t>
-            </a:r>
-            <a:r>
-              <a:rPr>
-                <a:latin typeface="Courier"/>
-              </a:rPr>
-              <a:t> </a:t>
-            </a:r>
-            <a:r>
-              <a:rPr>
-                <a:solidFill>
-                  <a:srgbClr val="BC7A00"/>
-                </a:solidFill>
-                <a:latin typeface="Courier"/>
-              </a:rPr>
-              <a:t>ValueError</a:t>
-            </a:r>
-            <a:r>
-              <a:rPr>
-                <a:latin typeface="Courier"/>
-              </a:rPr>
-              <a:t>(</a:t>
-            </a:r>
-            <a:r>
-              <a:rPr>
-                <a:solidFill>
-                  <a:srgbClr val="BB6688"/>
-                </a:solidFill>
-                <a:latin typeface="Courier"/>
-              </a:rPr>
-              <a:t>f"</a:t>
-            </a:r>
-            <a:r>
-              <a:rPr>
-                <a:solidFill>
-                  <a:srgbClr val="4070A0"/>
-                </a:solidFill>
-                <a:latin typeface="Courier"/>
-              </a:rPr>
-              <a:t>{</a:t>
-            </a:r>
-            <a:r>
-              <a:rPr>
-                <a:latin typeface="Courier"/>
-              </a:rPr>
-              <a:t>celsius</a:t>
-            </a:r>
-            <a:r>
-              <a:rPr>
-                <a:solidFill>
-                  <a:srgbClr val="4070A0"/>
-                </a:solidFill>
-                <a:latin typeface="Courier"/>
-              </a:rPr>
-              <a:t>}</a:t>
-            </a:r>
-            <a:r>
-              <a:rPr>
-                <a:solidFill>
-                  <a:srgbClr val="BB6688"/>
-                </a:solidFill>
-                <a:latin typeface="Courier"/>
-              </a:rPr>
-              <a:t> C is below absolute zero"</a:t>
-            </a:r>
-            <a:r>
-              <a:rPr>
-                <a:latin typeface="Courier"/>
-              </a:rPr>
-              <a:t>)</a:t>
-            </a:r>
-            <a:br/>
-            <a:r>
-              <a:rPr>
-                <a:latin typeface="Courier"/>
-              </a:rPr>
-              <a:t>        </a:t>
-            </a:r>
-            <a:r>
-              <a:rPr>
-                <a:solidFill>
-                  <a:srgbClr val="19177C"/>
-                </a:solidFill>
-                <a:latin typeface="Courier"/>
-              </a:rPr>
-              <a:t>self</a:t>
-            </a:r>
-            <a:r>
-              <a:rPr>
-                <a:latin typeface="Courier"/>
-              </a:rPr>
-              <a:t>._celsius </a:t>
-            </a:r>
-            <a:r>
-              <a:rPr>
-                <a:solidFill>
-                  <a:srgbClr val="666666"/>
-                </a:solidFill>
-                <a:latin typeface="Courier"/>
-              </a:rPr>
-              <a:t>=</a:t>
-            </a:r>
-            <a:r>
-              <a:rPr>
-                <a:latin typeface="Courier"/>
-              </a:rPr>
-              <a:t> celsius</a:t>
-            </a:r>
-            <a:br/>
-            <a:br/>
-            <a:r>
-              <a:rPr>
-                <a:latin typeface="Courier"/>
-              </a:rPr>
-              <a:t>    </a:t>
-            </a:r>
-            <a:r>
-              <a:rPr b="1">
-                <a:solidFill>
-                  <a:srgbClr val="007020"/>
-                </a:solidFill>
-                <a:latin typeface="Courier"/>
-              </a:rPr>
-              <a:t>def</a:t>
-            </a:r>
-            <a:r>
-              <a:rPr>
-                <a:latin typeface="Courier"/>
-              </a:rPr>
-              <a:t> celsius(</a:t>
-            </a:r>
-            <a:r>
-              <a:rPr>
-                <a:solidFill>
-                  <a:srgbClr val="19177C"/>
-                </a:solidFill>
-                <a:latin typeface="Courier"/>
-              </a:rPr>
-              <a:t>self</a:t>
-            </a:r>
-            <a:r>
-              <a:rPr>
-                <a:latin typeface="Courier"/>
-              </a:rPr>
-              <a:t>):</a:t>
-            </a:r>
-            <a:br/>
-            <a:r>
-              <a:rPr>
-                <a:latin typeface="Courier"/>
-              </a:rPr>
-              <a:t>        </a:t>
-            </a:r>
-            <a:r>
-              <a:rPr b="1">
-                <a:solidFill>
-                  <a:srgbClr val="007020"/>
-                </a:solidFill>
-                <a:latin typeface="Courier"/>
-              </a:rPr>
-              <a:t>return</a:t>
-            </a:r>
-            <a:r>
-              <a:rPr>
-                <a:latin typeface="Courier"/>
-              </a:rPr>
-              <a:t> </a:t>
-            </a:r>
-            <a:r>
-              <a:rPr>
-                <a:solidFill>
-                  <a:srgbClr val="19177C"/>
-                </a:solidFill>
-                <a:latin typeface="Courier"/>
-              </a:rPr>
-              <a:t>self</a:t>
-            </a:r>
-            <a:r>
-              <a:rPr>
-                <a:latin typeface="Courier"/>
-              </a:rPr>
-              <a:t>._celsius</a:t>
-            </a:r>
-            <a:br/>
-            <a:br/>
-            <a:r>
-              <a:rPr>
-                <a:latin typeface="Courier"/>
-              </a:rPr>
-              <a:t>    </a:t>
-            </a:r>
-            <a:r>
-              <a:rPr b="1">
-                <a:solidFill>
-                  <a:srgbClr val="007020"/>
-                </a:solidFill>
-                <a:latin typeface="Courier"/>
-              </a:rPr>
-              <a:t>def</a:t>
-            </a:r>
-            <a:r>
-              <a:rPr>
-                <a:latin typeface="Courier"/>
-              </a:rPr>
-              <a:t> fahrenheit(</a:t>
-            </a:r>
-            <a:r>
-              <a:rPr>
-                <a:solidFill>
-                  <a:srgbClr val="19177C"/>
-                </a:solidFill>
-                <a:latin typeface="Courier"/>
-              </a:rPr>
-              <a:t>self</a:t>
-            </a:r>
-            <a:r>
-              <a:rPr>
-                <a:latin typeface="Courier"/>
-              </a:rPr>
-              <a:t>):</a:t>
-            </a:r>
-            <a:br/>
-            <a:r>
-              <a:rPr>
-                <a:latin typeface="Courier"/>
-              </a:rPr>
-              <a:t>        </a:t>
-            </a:r>
-            <a:r>
-              <a:rPr b="1">
-                <a:solidFill>
-                  <a:srgbClr val="007020"/>
-                </a:solidFill>
-                <a:latin typeface="Courier"/>
-              </a:rPr>
-              <a:t>return</a:t>
-            </a:r>
-            <a:r>
-              <a:rPr>
-                <a:latin typeface="Courier"/>
-              </a:rPr>
-              <a:t> </a:t>
-            </a:r>
-            <a:r>
-              <a:rPr>
-                <a:solidFill>
-                  <a:srgbClr val="19177C"/>
-                </a:solidFill>
-                <a:latin typeface="Courier"/>
-              </a:rPr>
-              <a:t>self</a:t>
-            </a:r>
-            <a:r>
-              <a:rPr>
-                <a:latin typeface="Courier"/>
-              </a:rPr>
-              <a:t>._celsius </a:t>
-            </a:r>
-            <a:r>
-              <a:rPr>
-                <a:solidFill>
-                  <a:srgbClr val="666666"/>
-                </a:solidFill>
-                <a:latin typeface="Courier"/>
-              </a:rPr>
-              <a:t>*</a:t>
-            </a:r>
-            <a:r>
-              <a:rPr>
-                <a:latin typeface="Courier"/>
-              </a:rPr>
-              <a:t> </a:t>
-            </a:r>
-            <a:r>
-              <a:rPr>
-                <a:solidFill>
-                  <a:srgbClr val="40A070"/>
-                </a:solidFill>
-                <a:latin typeface="Courier"/>
-              </a:rPr>
-              <a:t>9</a:t>
-            </a:r>
-            <a:r>
-              <a:rPr>
-                <a:latin typeface="Courier"/>
-              </a:rPr>
-              <a:t> </a:t>
-            </a:r>
-            <a:r>
-              <a:rPr>
-                <a:solidFill>
-                  <a:srgbClr val="666666"/>
-                </a:solidFill>
-                <a:latin typeface="Courier"/>
-              </a:rPr>
-              <a:t>/</a:t>
-            </a:r>
-            <a:r>
-              <a:rPr>
-                <a:latin typeface="Courier"/>
-              </a:rPr>
-              <a:t> </a:t>
-            </a:r>
-            <a:r>
-              <a:rPr>
-                <a:solidFill>
-                  <a:srgbClr val="40A070"/>
-                </a:solidFill>
-                <a:latin typeface="Courier"/>
-              </a:rPr>
-              <a:t>5</a:t>
-            </a:r>
-            <a:r>
-              <a:rPr>
-                <a:latin typeface="Courier"/>
-              </a:rPr>
-              <a:t> </a:t>
-            </a:r>
-            <a:r>
-              <a:rPr>
-                <a:solidFill>
-                  <a:srgbClr val="666666"/>
-                </a:solidFill>
-                <a:latin typeface="Courier"/>
-              </a:rPr>
-              <a:t>+</a:t>
-            </a:r>
-            <a:r>
-              <a:rPr>
-                <a:latin typeface="Courier"/>
-              </a:rPr>
-              <a:t> </a:t>
-            </a:r>
-            <a:r>
-              <a:rPr>
-                <a:solidFill>
-                  <a:srgbClr val="40A070"/>
-                </a:solidFill>
-                <a:latin typeface="Courier"/>
-              </a:rPr>
-              <a:t>32</a:t>
+              <a:t># 150 — the only sanctioned way to read it</a:t>
             </a:r>
           </a:p>
         </p:txBody>
@@ -5377,7 +5247,86 @@
             </a:pPr>
             <a:r>
               <a:rPr/>
-              <a:t>What encapsulation is not</a:t>
+              <a:t>Tracing a bad withdrawal</a:t>
+            </a:r>
+          </a:p>
+        </p:txBody>
+      </p:sp>
+      <p:sp>
+        <p:nvSpPr>
+          <p:cNvPr id="3" name="Content Placeholder 2"/>
+          <p:cNvSpPr>
+            <a:spLocks noGrp="1"/>
+          </p:cNvSpPr>
+          <p:nvPr>
+            <p:ph idx="1"/>
+          </p:nvPr>
+        </p:nvSpPr>
+        <p:spPr/>
+        <p:txBody>
+          <a:bodyPr/>
+          <a:lstStyle/>
+          <a:p>
+            <a:pPr lvl="0" indent="0">
+              <a:buNone/>
+            </a:pPr>
+            <a:r>
+              <a:rPr>
+                <a:latin typeface="Courier"/>
+              </a:rPr>
+              <a:t>account </a:t>
+            </a:r>
+            <a:r>
+              <a:rPr>
+                <a:solidFill>
+                  <a:srgbClr val="666666"/>
+                </a:solidFill>
+                <a:latin typeface="Courier"/>
+              </a:rPr>
+              <a:t>=</a:t>
+            </a:r>
+            <a:r>
+              <a:rPr>
+                <a:latin typeface="Courier"/>
+              </a:rPr>
+              <a:t> BankAccount(</a:t>
+            </a:r>
+            <a:r>
+              <a:rPr>
+                <a:solidFill>
+                  <a:srgbClr val="40A070"/>
+                </a:solidFill>
+                <a:latin typeface="Courier"/>
+              </a:rPr>
+              <a:t>100</a:t>
+            </a:r>
+            <a:r>
+              <a:rPr>
+                <a:latin typeface="Courier"/>
+              </a:rPr>
+              <a:t>)</a:t>
+            </a:r>
+            <a:br/>
+            <a:r>
+              <a:rPr>
+                <a:latin typeface="Courier"/>
+              </a:rPr>
+              <a:t>account.withdraw(</a:t>
+            </a:r>
+            <a:r>
+              <a:rPr>
+                <a:solidFill>
+                  <a:srgbClr val="40A070"/>
+                </a:solidFill>
+                <a:latin typeface="Courier"/>
+              </a:rPr>
+              <a:t>1000</a:t>
+            </a:r>
+            <a:r>
+              <a:rPr>
+                <a:latin typeface="Courier"/>
+              </a:rPr>
+              <a:t>)</a:t>
             </a:r>
           </a:p>
         </p:txBody>
@@ -5424,7 +5373,561 @@
             </a:pPr>
             <a:r>
               <a:rPr/>
-              <a:t>Exercise (do this before the lab)</a:t>
+              <a:t>A second worked example: enforcing a valid range</a:t>
+            </a:r>
+          </a:p>
+        </p:txBody>
+      </p:sp>
+      <p:sp>
+        <p:nvSpPr>
+          <p:cNvPr id="3" name="Content Placeholder 2"/>
+          <p:cNvSpPr>
+            <a:spLocks noGrp="1"/>
+          </p:cNvSpPr>
+          <p:nvPr>
+            <p:ph idx="1"/>
+          </p:nvPr>
+        </p:nvSpPr>
+        <p:spPr/>
+        <p:txBody>
+          <a:bodyPr/>
+          <a:lstStyle/>
+          <a:p>
+            <a:pPr lvl="0" indent="0">
+              <a:buNone/>
+            </a:pPr>
+            <a:r>
+              <a:rPr b="1">
+                <a:solidFill>
+                  <a:srgbClr val="007020"/>
+                </a:solidFill>
+                <a:latin typeface="Courier"/>
+              </a:rPr>
+              <a:t>class</a:t>
+            </a:r>
+            <a:r>
+              <a:rPr>
+                <a:latin typeface="Courier"/>
+              </a:rPr>
+              <a:t> Temperature:</a:t>
+            </a:r>
+            <a:br/>
+            <a:r>
+              <a:rPr>
+                <a:latin typeface="Courier"/>
+              </a:rPr>
+              <a:t>    </a:t>
+            </a:r>
+            <a:r>
+              <a:rPr i="1">
+                <a:solidFill>
+                  <a:srgbClr val="60A0B0"/>
+                </a:solidFill>
+                <a:latin typeface="Courier"/>
+              </a:rPr>
+              <a:t>"""Stores a temperature in Celsius, refusing physically impossible values."""</a:t>
+            </a:r>
+            <a:br/>
+            <a:br/>
+            <a:r>
+              <a:rPr>
+                <a:latin typeface="Courier"/>
+              </a:rPr>
+              <a:t>    ABSOLUTE_ZERO_C </a:t>
+            </a:r>
+            <a:r>
+              <a:rPr>
+                <a:solidFill>
+                  <a:srgbClr val="666666"/>
+                </a:solidFill>
+                <a:latin typeface="Courier"/>
+              </a:rPr>
+              <a:t>=</a:t>
+            </a:r>
+            <a:r>
+              <a:rPr>
+                <a:latin typeface="Courier"/>
+              </a:rPr>
+              <a:t> </a:t>
+            </a:r>
+            <a:r>
+              <a:rPr>
+                <a:solidFill>
+                  <a:srgbClr val="666666"/>
+                </a:solidFill>
+                <a:latin typeface="Courier"/>
+              </a:rPr>
+              <a:t>-</a:t>
+            </a:r>
+            <a:r>
+              <a:rPr>
+                <a:solidFill>
+                  <a:srgbClr val="40A070"/>
+                </a:solidFill>
+                <a:latin typeface="Courier"/>
+              </a:rPr>
+              <a:t>273.15</a:t>
+            </a:r>
+            <a:br/>
+            <a:br/>
+            <a:r>
+              <a:rPr>
+                <a:latin typeface="Courier"/>
+              </a:rPr>
+              <a:t>    </a:t>
+            </a:r>
+            <a:r>
+              <a:rPr b="1">
+                <a:solidFill>
+                  <a:srgbClr val="007020"/>
+                </a:solidFill>
+                <a:latin typeface="Courier"/>
+              </a:rPr>
+              <a:t>def</a:t>
+            </a:r>
+            <a:r>
+              <a:rPr>
+                <a:latin typeface="Courier"/>
+              </a:rPr>
+              <a:t> </a:t>
+            </a:r>
+            <a:r>
+              <a:rPr>
+                <a:solidFill>
+                  <a:srgbClr val="06287E"/>
+                </a:solidFill>
+                <a:latin typeface="Courier"/>
+              </a:rPr>
+              <a:t>__init__</a:t>
+            </a:r>
+            <a:r>
+              <a:rPr>
+                <a:latin typeface="Courier"/>
+              </a:rPr>
+              <a:t>(</a:t>
+            </a:r>
+            <a:r>
+              <a:rPr>
+                <a:solidFill>
+                  <a:srgbClr val="19177C"/>
+                </a:solidFill>
+                <a:latin typeface="Courier"/>
+              </a:rPr>
+              <a:t>self</a:t>
+            </a:r>
+            <a:r>
+              <a:rPr>
+                <a:latin typeface="Courier"/>
+              </a:rPr>
+              <a:t>, celsius):</a:t>
+            </a:r>
+            <a:br/>
+            <a:r>
+              <a:rPr>
+                <a:latin typeface="Courier"/>
+              </a:rPr>
+              <a:t>        </a:t>
+            </a:r>
+            <a:r>
+              <a:rPr b="1">
+                <a:solidFill>
+                  <a:srgbClr val="007020"/>
+                </a:solidFill>
+                <a:latin typeface="Courier"/>
+              </a:rPr>
+              <a:t>if</a:t>
+            </a:r>
+            <a:r>
+              <a:rPr>
+                <a:latin typeface="Courier"/>
+              </a:rPr>
+              <a:t> celsius </a:t>
+            </a:r>
+            <a:r>
+              <a:rPr>
+                <a:solidFill>
+                  <a:srgbClr val="666666"/>
+                </a:solidFill>
+                <a:latin typeface="Courier"/>
+              </a:rPr>
+              <a:t>&lt;</a:t>
+            </a:r>
+            <a:r>
+              <a:rPr>
+                <a:latin typeface="Courier"/>
+              </a:rPr>
+              <a:t> </a:t>
+            </a:r>
+            <a:r>
+              <a:rPr>
+                <a:solidFill>
+                  <a:srgbClr val="19177C"/>
+                </a:solidFill>
+                <a:latin typeface="Courier"/>
+              </a:rPr>
+              <a:t>self</a:t>
+            </a:r>
+            <a:r>
+              <a:rPr>
+                <a:latin typeface="Courier"/>
+              </a:rPr>
+              <a:t>.ABSOLUTE_ZERO_C:</a:t>
+            </a:r>
+            <a:br/>
+            <a:r>
+              <a:rPr>
+                <a:latin typeface="Courier"/>
+              </a:rPr>
+              <a:t>            </a:t>
+            </a:r>
+            <a:r>
+              <a:rPr b="1">
+                <a:solidFill>
+                  <a:srgbClr val="007020"/>
+                </a:solidFill>
+                <a:latin typeface="Courier"/>
+              </a:rPr>
+              <a:t>raise</a:t>
+            </a:r>
+            <a:r>
+              <a:rPr>
+                <a:latin typeface="Courier"/>
+              </a:rPr>
+              <a:t> </a:t>
+            </a:r>
+            <a:r>
+              <a:rPr>
+                <a:solidFill>
+                  <a:srgbClr val="BC7A00"/>
+                </a:solidFill>
+                <a:latin typeface="Courier"/>
+              </a:rPr>
+              <a:t>ValueError</a:t>
+            </a:r>
+            <a:r>
+              <a:rPr>
+                <a:latin typeface="Courier"/>
+              </a:rPr>
+              <a:t>(</a:t>
+            </a:r>
+            <a:r>
+              <a:rPr>
+                <a:solidFill>
+                  <a:srgbClr val="BB6688"/>
+                </a:solidFill>
+                <a:latin typeface="Courier"/>
+              </a:rPr>
+              <a:t>f"</a:t>
+            </a:r>
+            <a:r>
+              <a:rPr>
+                <a:solidFill>
+                  <a:srgbClr val="4070A0"/>
+                </a:solidFill>
+                <a:latin typeface="Courier"/>
+              </a:rPr>
+              <a:t>{</a:t>
+            </a:r>
+            <a:r>
+              <a:rPr>
+                <a:latin typeface="Courier"/>
+              </a:rPr>
+              <a:t>celsius</a:t>
+            </a:r>
+            <a:r>
+              <a:rPr>
+                <a:solidFill>
+                  <a:srgbClr val="4070A0"/>
+                </a:solidFill>
+                <a:latin typeface="Courier"/>
+              </a:rPr>
+              <a:t>}</a:t>
+            </a:r>
+            <a:r>
+              <a:rPr>
+                <a:solidFill>
+                  <a:srgbClr val="BB6688"/>
+                </a:solidFill>
+                <a:latin typeface="Courier"/>
+              </a:rPr>
+              <a:t> C is below absolute zero"</a:t>
+            </a:r>
+            <a:r>
+              <a:rPr>
+                <a:latin typeface="Courier"/>
+              </a:rPr>
+              <a:t>)</a:t>
+            </a:r>
+            <a:br/>
+            <a:r>
+              <a:rPr>
+                <a:latin typeface="Courier"/>
+              </a:rPr>
+              <a:t>        </a:t>
+            </a:r>
+            <a:r>
+              <a:rPr>
+                <a:solidFill>
+                  <a:srgbClr val="19177C"/>
+                </a:solidFill>
+                <a:latin typeface="Courier"/>
+              </a:rPr>
+              <a:t>self</a:t>
+            </a:r>
+            <a:r>
+              <a:rPr>
+                <a:latin typeface="Courier"/>
+              </a:rPr>
+              <a:t>._celsius </a:t>
+            </a:r>
+            <a:r>
+              <a:rPr>
+                <a:solidFill>
+                  <a:srgbClr val="666666"/>
+                </a:solidFill>
+                <a:latin typeface="Courier"/>
+              </a:rPr>
+              <a:t>=</a:t>
+            </a:r>
+            <a:r>
+              <a:rPr>
+                <a:latin typeface="Courier"/>
+              </a:rPr>
+              <a:t> celsius</a:t>
+            </a:r>
+            <a:br/>
+            <a:br/>
+            <a:r>
+              <a:rPr>
+                <a:latin typeface="Courier"/>
+              </a:rPr>
+              <a:t>    </a:t>
+            </a:r>
+            <a:r>
+              <a:rPr b="1">
+                <a:solidFill>
+                  <a:srgbClr val="007020"/>
+                </a:solidFill>
+                <a:latin typeface="Courier"/>
+              </a:rPr>
+              <a:t>def</a:t>
+            </a:r>
+            <a:r>
+              <a:rPr>
+                <a:latin typeface="Courier"/>
+              </a:rPr>
+              <a:t> celsius(</a:t>
+            </a:r>
+            <a:r>
+              <a:rPr>
+                <a:solidFill>
+                  <a:srgbClr val="19177C"/>
+                </a:solidFill>
+                <a:latin typeface="Courier"/>
+              </a:rPr>
+              <a:t>self</a:t>
+            </a:r>
+            <a:r>
+              <a:rPr>
+                <a:latin typeface="Courier"/>
+              </a:rPr>
+              <a:t>):</a:t>
+            </a:r>
+            <a:br/>
+            <a:r>
+              <a:rPr>
+                <a:latin typeface="Courier"/>
+              </a:rPr>
+              <a:t>        </a:t>
+            </a:r>
+            <a:r>
+              <a:rPr b="1">
+                <a:solidFill>
+                  <a:srgbClr val="007020"/>
+                </a:solidFill>
+                <a:latin typeface="Courier"/>
+              </a:rPr>
+              <a:t>return</a:t>
+            </a:r>
+            <a:r>
+              <a:rPr>
+                <a:latin typeface="Courier"/>
+              </a:rPr>
+              <a:t> </a:t>
+            </a:r>
+            <a:r>
+              <a:rPr>
+                <a:solidFill>
+                  <a:srgbClr val="19177C"/>
+                </a:solidFill>
+                <a:latin typeface="Courier"/>
+              </a:rPr>
+              <a:t>self</a:t>
+            </a:r>
+            <a:r>
+              <a:rPr>
+                <a:latin typeface="Courier"/>
+              </a:rPr>
+              <a:t>._celsius</a:t>
+            </a:r>
+            <a:br/>
+            <a:br/>
+            <a:r>
+              <a:rPr>
+                <a:latin typeface="Courier"/>
+              </a:rPr>
+              <a:t>    </a:t>
+            </a:r>
+            <a:r>
+              <a:rPr b="1">
+                <a:solidFill>
+                  <a:srgbClr val="007020"/>
+                </a:solidFill>
+                <a:latin typeface="Courier"/>
+              </a:rPr>
+              <a:t>def</a:t>
+            </a:r>
+            <a:r>
+              <a:rPr>
+                <a:latin typeface="Courier"/>
+              </a:rPr>
+              <a:t> fahrenheit(</a:t>
+            </a:r>
+            <a:r>
+              <a:rPr>
+                <a:solidFill>
+                  <a:srgbClr val="19177C"/>
+                </a:solidFill>
+                <a:latin typeface="Courier"/>
+              </a:rPr>
+              <a:t>self</a:t>
+            </a:r>
+            <a:r>
+              <a:rPr>
+                <a:latin typeface="Courier"/>
+              </a:rPr>
+              <a:t>):</a:t>
+            </a:r>
+            <a:br/>
+            <a:r>
+              <a:rPr>
+                <a:latin typeface="Courier"/>
+              </a:rPr>
+              <a:t>        </a:t>
+            </a:r>
+            <a:r>
+              <a:rPr b="1">
+                <a:solidFill>
+                  <a:srgbClr val="007020"/>
+                </a:solidFill>
+                <a:latin typeface="Courier"/>
+              </a:rPr>
+              <a:t>return</a:t>
+            </a:r>
+            <a:r>
+              <a:rPr>
+                <a:latin typeface="Courier"/>
+              </a:rPr>
+              <a:t> </a:t>
+            </a:r>
+            <a:r>
+              <a:rPr>
+                <a:solidFill>
+                  <a:srgbClr val="19177C"/>
+                </a:solidFill>
+                <a:latin typeface="Courier"/>
+              </a:rPr>
+              <a:t>self</a:t>
+            </a:r>
+            <a:r>
+              <a:rPr>
+                <a:latin typeface="Courier"/>
+              </a:rPr>
+              <a:t>._celsius </a:t>
+            </a:r>
+            <a:r>
+              <a:rPr>
+                <a:solidFill>
+                  <a:srgbClr val="666666"/>
+                </a:solidFill>
+                <a:latin typeface="Courier"/>
+              </a:rPr>
+              <a:t>*</a:t>
+            </a:r>
+            <a:r>
+              <a:rPr>
+                <a:latin typeface="Courier"/>
+              </a:rPr>
+              <a:t> </a:t>
+            </a:r>
+            <a:r>
+              <a:rPr>
+                <a:solidFill>
+                  <a:srgbClr val="40A070"/>
+                </a:solidFill>
+                <a:latin typeface="Courier"/>
+              </a:rPr>
+              <a:t>9</a:t>
+            </a:r>
+            <a:r>
+              <a:rPr>
+                <a:latin typeface="Courier"/>
+              </a:rPr>
+              <a:t> </a:t>
+            </a:r>
+            <a:r>
+              <a:rPr>
+                <a:solidFill>
+                  <a:srgbClr val="666666"/>
+                </a:solidFill>
+                <a:latin typeface="Courier"/>
+              </a:rPr>
+              <a:t>/</a:t>
+            </a:r>
+            <a:r>
+              <a:rPr>
+                <a:latin typeface="Courier"/>
+              </a:rPr>
+              <a:t> </a:t>
+            </a:r>
+            <a:r>
+              <a:rPr>
+                <a:solidFill>
+                  <a:srgbClr val="40A070"/>
+                </a:solidFill>
+                <a:latin typeface="Courier"/>
+              </a:rPr>
+              <a:t>5</a:t>
+            </a:r>
+            <a:r>
+              <a:rPr>
+                <a:latin typeface="Courier"/>
+              </a:rPr>
+              <a:t> </a:t>
+            </a:r>
+            <a:r>
+              <a:rPr>
+                <a:solidFill>
+                  <a:srgbClr val="666666"/>
+                </a:solidFill>
+                <a:latin typeface="Courier"/>
+              </a:rPr>
+              <a:t>+</a:t>
+            </a:r>
+            <a:r>
+              <a:rPr>
+                <a:latin typeface="Courier"/>
+              </a:rPr>
+              <a:t> </a:t>
+            </a:r>
+            <a:r>
+              <a:rPr>
+                <a:solidFill>
+                  <a:srgbClr val="40A070"/>
+                </a:solidFill>
+                <a:latin typeface="Courier"/>
+              </a:rPr>
+              <a:t>32</a:t>
             </a:r>
           </a:p>
         </p:txBody>
@@ -5471,7 +5974,7 @@
             </a:pPr>
             <a:r>
               <a:rPr/>
-              <a:t>Before next lecture</a:t>
+              <a:t>What encapsulation is not</a:t>
             </a:r>
           </a:p>
         </p:txBody>
